--- a/apps/resources/bundled_files/2-klass-ubakyt-oyun-atyshuu.pptx
+++ b/apps/resources/bundled_files/2-klass-ubakyt-oyun-atyshuu.pptx
@@ -3797,7 +3797,7 @@
                 </a:solidFill>
                 <a:latin typeface="PT Sans"/>
               </a:rPr>
-              <a:t>2-класс ›</a:t>
+              <a:t/>
             </a:r>
           </a:p>
           <a:p>
@@ -4705,7 +4705,7 @@
                 </a:solidFill>
                 <a:latin typeface="PT Sans"/>
               </a:rPr>
-              <a:t>2-класс ›</a:t>
+              <a:t/>
             </a:r>
           </a:p>
           <a:p>
@@ -7847,7 +7847,7 @@
                 </a:solidFill>
                 <a:latin typeface="PT Sans"/>
               </a:rPr>
-              <a:t>2-класс ›</a:t>
+              <a:t/>
             </a:r>
           </a:p>
           <a:p>
@@ -11007,7 +11007,7 @@
                 </a:solidFill>
                 <a:latin typeface="PT Sans"/>
               </a:rPr>
-              <a:t>2-класс ›</a:t>
+              <a:t/>
             </a:r>
           </a:p>
           <a:p>
@@ -11467,7 +11467,7 @@
                 </a:solidFill>
                 <a:latin typeface="PT Sans"/>
               </a:rPr>
-              <a:t>2-класс ›</a:t>
+              <a:t/>
             </a:r>
           </a:p>
           <a:p>
@@ -11945,7 +11945,7 @@
                 </a:solidFill>
                 <a:latin typeface="PT Sans"/>
               </a:rPr>
-              <a:t>2-класс ›</a:t>
+              <a:t/>
             </a:r>
           </a:p>
           <a:p>
@@ -15087,7 +15087,7 @@
                 </a:solidFill>
                 <a:latin typeface="PT Sans"/>
               </a:rPr>
-              <a:t>2-класс ›</a:t>
+              <a:t/>
             </a:r>
           </a:p>
           <a:p>
@@ -18247,7 +18247,7 @@
                 </a:solidFill>
                 <a:latin typeface="PT Sans"/>
               </a:rPr>
-              <a:t>2-класс ›</a:t>
+              <a:t/>
             </a:r>
           </a:p>
           <a:p>
@@ -18707,7 +18707,7 @@
                 </a:solidFill>
                 <a:latin typeface="PT Sans"/>
               </a:rPr>
-              <a:t>2-класс ›</a:t>
+              <a:t/>
             </a:r>
           </a:p>
           <a:p>
@@ -19185,7 +19185,7 @@
                 </a:solidFill>
                 <a:latin typeface="PT Sans"/>
               </a:rPr>
-              <a:t>2-класс ›</a:t>
+              <a:t/>
             </a:r>
           </a:p>
           <a:p>
@@ -22327,7 +22327,7 @@
                 </a:solidFill>
                 <a:latin typeface="PT Sans"/>
               </a:rPr>
-              <a:t>2-класс ›</a:t>
+              <a:t/>
             </a:r>
           </a:p>
           <a:p>
@@ -25487,7 +25487,7 @@
                 </a:solidFill>
                 <a:latin typeface="PT Sans"/>
               </a:rPr>
-              <a:t>2-класс ›</a:t>
+              <a:t/>
             </a:r>
           </a:p>
           <a:p>
@@ -28629,7 +28629,7 @@
                 </a:solidFill>
                 <a:latin typeface="PT Sans"/>
               </a:rPr>
-              <a:t>2-класс ›</a:t>
+              <a:t/>
             </a:r>
           </a:p>
           <a:p>
@@ -29089,7 +29089,7 @@
                 </a:solidFill>
                 <a:latin typeface="PT Sans"/>
               </a:rPr>
-              <a:t>2-класс ›</a:t>
+              <a:t/>
             </a:r>
           </a:p>
           <a:p>
@@ -29567,7 +29567,7 @@
                 </a:solidFill>
                 <a:latin typeface="PT Sans"/>
               </a:rPr>
-              <a:t>2-класс ›</a:t>
+              <a:t/>
             </a:r>
           </a:p>
           <a:p>
@@ -30027,7 +30027,7 @@
                 </a:solidFill>
                 <a:latin typeface="PT Sans"/>
               </a:rPr>
-              <a:t>2-класс ›</a:t>
+              <a:t/>
             </a:r>
           </a:p>
           <a:p>
@@ -30505,7 +30505,7 @@
                 </a:solidFill>
                 <a:latin typeface="PT Sans"/>
               </a:rPr>
-              <a:t>2-класс ›</a:t>
+              <a:t/>
             </a:r>
           </a:p>
           <a:p>
@@ -30965,7 +30965,7 @@
                 </a:solidFill>
                 <a:latin typeface="PT Sans"/>
               </a:rPr>
-              <a:t>2-класс ›</a:t>
+              <a:t/>
             </a:r>
           </a:p>
           <a:p>
@@ -31443,7 +31443,7 @@
                 </a:solidFill>
                 <a:latin typeface="PT Sans"/>
               </a:rPr>
-              <a:t>2-класс ›</a:t>
+              <a:t/>
             </a:r>
           </a:p>
           <a:p>
@@ -34603,7 +34603,7 @@
                 </a:solidFill>
                 <a:latin typeface="PT Sans"/>
               </a:rPr>
-              <a:t>2-класс ›</a:t>
+              <a:t/>
             </a:r>
           </a:p>
           <a:p>
@@ -35063,7 +35063,7 @@
                 </a:solidFill>
                 <a:latin typeface="PT Sans"/>
               </a:rPr>
-              <a:t>2-класс ›</a:t>
+              <a:t/>
             </a:r>
           </a:p>
           <a:p>
@@ -35541,7 +35541,7 @@
                 </a:solidFill>
                 <a:latin typeface="PT Sans"/>
               </a:rPr>
-              <a:t>2-класс ›</a:t>
+              <a:t/>
             </a:r>
           </a:p>
           <a:p>
@@ -38683,7 +38683,7 @@
                 </a:solidFill>
                 <a:latin typeface="PT Sans"/>
               </a:rPr>
-              <a:t>2-класс ›</a:t>
+              <a:t/>
             </a:r>
           </a:p>
           <a:p>
@@ -41843,7 +41843,7 @@
                 </a:solidFill>
                 <a:latin typeface="PT Sans"/>
               </a:rPr>
-              <a:t>2-класс ›</a:t>
+              <a:t/>
             </a:r>
           </a:p>
           <a:p>
@@ -42303,7 +42303,7 @@
                 </a:solidFill>
                 <a:latin typeface="PT Sans"/>
               </a:rPr>
-              <a:t>2-класс ›</a:t>
+              <a:t/>
             </a:r>
           </a:p>
           <a:p>
